--- a/it/slides/06-Architettura_dei_Calcolatori-Rappresentazione_dei_Numeri_Reali-Codice.pptx
+++ b/it/slides/06-Architettura_dei_Calcolatori-Rappresentazione_dei_Numeri_Reali-Codice.pptx
@@ -120,27 +120,35 @@
   <p:extLst>
     <p:ext uri="{521415D9-36F7-43E2-AB2F-B90AF26B5E84}">
       <p14:sectionLst xmlns:p14="http://schemas.microsoft.com/office/powerpoint/2010/main">
-        <p14:section name="Apertura" id="{46992f21-21c7-cdca-7721-10977ec19fa1}">
+        <p14:section name="Apertura" id="{3582d5fb-f95c-f326-30b2-cceeba992eb7}">
           <p14:sldIdLst>
             <p14:sldId id="256"/>
             <p14:sldId id="257"/>
           </p14:sldIdLst>
         </p14:section>
-        <p14:section name="I listati" id="{4f14c869-ee7d-4c86-4194-49225b6b950b}">
+        <p14:section name="Riscaldamento sulla macchina" id="{af3e2b21-2daf-122e-e850-59ffef52941e}">
           <p14:sldIdLst>
             <p14:sldId id="258"/>
+          </p14:sldIdLst>
+        </p14:section>
+        <p14:section name="Virgola fissa" id="{2fd0d4af-41bf-39d8-b12f-775602eabd81}">
+          <p14:sldIdLst>
             <p14:sldId id="259"/>
+          </p14:sldIdLst>
+        </p14:section>
+        <p14:section name="Virgola mobile" id="{3509fce8-91ab-06b3-313e-4c129e582f2b}">
+          <p14:sldIdLst>
             <p14:sldId id="260"/>
           </p14:sldIdLst>
         </p14:section>
-        <p14:section name="Il programma completo" id="{b4e66f78-3201-4e2b-72bf-7c235d0d8e7a}">
+        <p14:section name="Il programma completo" id="{83529893-d1fa-d853-9c79-039e176d1949}">
           <p14:sldIdLst>
             <p14:sldId id="261"/>
             <p14:sldId id="262"/>
             <p14:sldId id="263"/>
           </p14:sldIdLst>
         </p14:section>
-        <p14:section name="Eseguire e provare" id="{ea3dc043-767b-ca17-c6f2-4261300cfc50}">
+        <p14:section name="Eseguire e provare" id="{5cf1d187-7925-de94-8dcd-ddd34980b36f}">
           <p14:sldIdLst>
             <p14:sldId id="264"/>
             <p14:sldId id="265"/>
@@ -149,7 +157,7 @@
             <p14:sldId id="268"/>
           </p14:sldIdLst>
         </p14:section>
-        <p14:section name="Esercizi" id="{b5fcc6b2-1b4f-20de-c45d-68f42c15ee92}">
+        <p14:section name="Esercizi" id="{d73f216c-2569-7113-4d67-beae3e61606c}">
           <p14:sldIdLst>
             <p14:sldId id="269"/>
           </p14:sldIdLst>
@@ -2689,7 +2697,63 @@
       </p:sp>
       <p:sp>
         <p:nvSpPr>
-          <p:cNvPr id="11" name="Shape 9"/>
+          <p:cNvPr id="11" name="Text 9"/>
+          <p:cNvSpPr txBox="1"/>
+          <p:nvPr/>
+        </p:nvSpPr>
+        <p:spPr>
+          <a:xfrm>
+            <a:off x="4693615" y="566928"/>
+            <a:ext cx="6949440" cy="640080"/>
+          </a:xfrm>
+          <a:prstGeom prst="rect">
+            <a:avLst/>
+          </a:prstGeom>
+          <a:noFill/>
+          <a:ln/>
+        </p:spPr>
+        <p:txBody>
+          <a:bodyPr wrap="square" lIns="0" tIns="0" rIns="0" bIns="0" rtlCol="0" anchor="t"/>
+          <a:lstStyle/>
+          <a:p>
+            <a:pPr algn="r" indent="0" marL="0">
+              <a:buNone/>
+            </a:pPr>
+            <a:r>
+              <a:rPr lang="en-US" sz="1300" dirty="0">
+                <a:solidFill>
+                  <a:srgbClr val="CFE3EA"/>
+                </a:solidFill>
+                <a:latin typeface="Calibri" pitchFamily="34" charset="0"/>
+                <a:ea typeface="Calibri" pitchFamily="34" charset="-122"/>
+                <a:cs typeface="Calibri" pitchFamily="34" charset="-120"/>
+              </a:rPr>
+              <a:t>Presentazione del codice. I concetti, le figure e le domande sono nella presentazione della lezione:</a:t>
+            </a:r>
+            <a:endParaRPr lang="en-US" sz="1300" dirty="0"/>
+          </a:p>
+          <a:p>
+            <a:pPr algn="r" indent="0" marL="0">
+              <a:buNone/>
+            </a:pPr>
+            <a:r>
+              <a:rPr lang="en-US" sz="1300" dirty="0">
+                <a:solidFill>
+                  <a:srgbClr val="CFE3EA"/>
+                </a:solidFill>
+                <a:latin typeface="Calibri" pitchFamily="34" charset="0"/>
+                <a:ea typeface="Calibri" pitchFamily="34" charset="-122"/>
+                <a:cs typeface="Calibri" pitchFamily="34" charset="-120"/>
+              </a:rPr>
+              <a:t>06-Architettura_dei_Calcolatori-Rappresentazione_dei_Numeri_Reali.pptx</a:t>
+            </a:r>
+            <a:endParaRPr lang="en-US" sz="1300" dirty="0"/>
+          </a:p>
+        </p:txBody>
+      </p:sp>
+      <p:sp>
+        <p:nvSpPr>
+          <p:cNvPr id="12" name="Shape 10"/>
           <p:cNvSpPr/>
           <p:nvPr/>
         </p:nvSpPr>
@@ -2716,7 +2780,7 @@
       </p:sp>
       <p:pic>
         <p:nvPicPr>
-          <p:cNvPr id="12" name="Image 0" descr="/Users/raffaelemontella/devel/riscv-prg32/computer-architecture-with-prg32/tools/assets/game_raycaster.png">    </p:cNvPr>
+          <p:cNvPr id="13" name="Image 0" descr="/Users/raffaelemontella/devel/riscv-prg32/computer-architecture-with-prg32/tools/assets/game_raycaster.png">    </p:cNvPr>
           <p:cNvPicPr>
             <a:picLocks noChangeAspect="1"/>
           </p:cNvPicPr>

--- a/it/slides/06-Architettura_dei_Calcolatori-Rappresentazione_dei_Numeri_Reali-Codice.pptx
+++ b/it/slides/06-Architettura_dei_Calcolatori-Rappresentazione_dei_Numeri_Reali-Codice.pptx
@@ -120,35 +120,35 @@
   <p:extLst>
     <p:ext uri="{521415D9-36F7-43E2-AB2F-B90AF26B5E84}">
       <p14:sectionLst xmlns:p14="http://schemas.microsoft.com/office/powerpoint/2010/main">
-        <p14:section name="Apertura" id="{3582d5fb-f95c-f326-30b2-cceeba992eb7}">
+        <p14:section name="Apertura" id="{ab848faa-13dc-70f2-e48d-1010daedb598}">
           <p14:sldIdLst>
             <p14:sldId id="256"/>
             <p14:sldId id="257"/>
           </p14:sldIdLst>
         </p14:section>
-        <p14:section name="Riscaldamento sulla macchina" id="{af3e2b21-2daf-122e-e850-59ffef52941e}">
+        <p14:section name="Riscaldamento sulla macchina" id="{1de02f3c-78cc-ed35-3ce0-5762024f0a42}">
           <p14:sldIdLst>
             <p14:sldId id="258"/>
           </p14:sldIdLst>
         </p14:section>
-        <p14:section name="Virgola fissa" id="{2fd0d4af-41bf-39d8-b12f-775602eabd81}">
+        <p14:section name="Virgola fissa" id="{dfde395b-d1cc-d351-9631-178ed4b43b07}">
           <p14:sldIdLst>
             <p14:sldId id="259"/>
           </p14:sldIdLst>
         </p14:section>
-        <p14:section name="Virgola mobile" id="{3509fce8-91ab-06b3-313e-4c129e582f2b}">
+        <p14:section name="Virgola mobile" id="{0de386b1-db2f-73b4-e814-fe292480b60e}">
           <p14:sldIdLst>
             <p14:sldId id="260"/>
           </p14:sldIdLst>
         </p14:section>
-        <p14:section name="Il programma completo" id="{83529893-d1fa-d853-9c79-039e176d1949}">
+        <p14:section name="Il programma completo" id="{4dbfd44d-9cf2-2edf-d23e-b0e4d00b6c32}">
           <p14:sldIdLst>
             <p14:sldId id="261"/>
             <p14:sldId id="262"/>
             <p14:sldId id="263"/>
           </p14:sldIdLst>
         </p14:section>
-        <p14:section name="Eseguire e provare" id="{5cf1d187-7925-de94-8dcd-ddd34980b36f}">
+        <p14:section name="Eseguire e provare" id="{185d03c9-4980-1ef2-5b4d-efd314437652}">
           <p14:sldIdLst>
             <p14:sldId id="264"/>
             <p14:sldId id="265"/>
@@ -157,7 +157,7 @@
             <p14:sldId id="268"/>
           </p14:sldIdLst>
         </p14:section>
-        <p14:section name="Esercizi" id="{d73f216c-2569-7113-4d67-beae3e61606c}">
+        <p14:section name="Esercizi" id="{cd27182d-52e8-f42c-57cd-64cfa89ef69d}">
           <p14:sldIdLst>
             <p14:sldId id="269"/>
           </p14:sldIdLst>
@@ -566,7 +566,9 @@
           <a:p>
             <a:r>
               <a:rPr lang="en-US" dirty="0"/>
-              <a:t>Questa è la presentazione del codice della Lezione 06. La presentazione della lezione contiene i concetti; questa contiene tutto ciò che si scrive e si esegue: i listati con la loro spiegazione, il programma completo, che cosa mostra, e il modo di provarlo su ciascuno dei tre host.</a:t>
+              <a:t>Questa è la presentazione del codice della Lezione 06. La presentazione della lezione contiene i concetti; questa contiene tutto ciò che si scrive e si esegue: i listati con la loro spiegazione, il programma completo, che cosa mostra, e il modo di provarlo su ciascuno dei tre host.
+Stato di apprendimento: DA COMPRENDERE OGGI, alla fine di questa lezione lo spiegate, lo seguite passo passo e lo applicate da soli; DA UTILIZZARE OGGI, oggi seguite e usate la ricetta; come funziona dentro si spiega più avanti, o non fa parte del corso; DA COMPRENDERE PIÙ AVANTI, riconoscete il nome e lo scopo; lo spiega una lezione successiva. Una slide senza etichetta è contesto: una storia, un esempio, una domanda, un esercizio.
+Stato di apprendimento di questa lezione. DA COMPRENDERE OGGI: la virgola fissa; complemento a uno ed eccesso k; la virgola mobile IEEE 754; il nome RV32IMAC. DA UTILIZZARE OGGI: il programma completo, gli strumenti di PRG32 (si usa, non si studia, in questo corso). DA COMPRENDERE PIÙ AVANTI: niente. Una slide senza etichetta è contesto: una storia, un esempio, una domanda, un esercizio.</a:t>
             </a:r>
             <a:endParaRPr lang="en-US" dirty="0"/>
           </a:p>
@@ -655,6 +657,7 @@
             <a:r>
               <a:rPr lang="en-US" dirty="0"/>
               <a:t>La via più rapida: PRG32-QT sul vostro computer. Quattro passi, ciascuno con il suo comando. PRG32-QT si comporta come una scheda sulla porta 8080, ed è per questo che il comando di caricamento dice esp32c6. Con la modalità debug abilitata potete fermarvi su qualsiasi istruzione e leggere registri e memoria.
+DA UTILIZZARE OGGI: gli strumenti di PRG32 (si usa, non si studia, in questo corso).
 Per il docente: Eseguito dai test: la cartuccia di questa slide è compilata con questo comando ed eseguita sull'esecutore senza interfaccia di PRG32-QT. Senza la toolchain: importate il file .prg32 in PRG32-QT e scegliete Run Cartridge. Tasti: frecce o WASD per il joystick, Z o J per A, X o K per B, Invio per Start, Esc per tornare a Setup.</a:t>
             </a:r>
             <a:endParaRPr lang="en-US" dirty="0"/>
@@ -744,6 +747,7 @@
             <a:r>
               <a:rPr lang="en-US" dirty="0"/>
               <a:t>Lo stesso programma sull'emulatore. QEMU esegue il firmware vero su un chip emulato, quindi la cartuccia va compilata per l'architettura qemu. Caricate la cartuccia mentre QEMU è chiuso. Il firmware si apre sul menu Setup: scegliete Run Cartridge e lo slot. Ricordate che la tastiera è letta dal terminale, non dalla finestra con l'immagine.
+DA UTILIZZARE OGGI: gli strumenti di PRG32 (si usa, non si studia, in questo corso).
 Per il docente: Verificato dai test fino al caricamento: la cartuccia è compilata per l'architettura qemu e accettata nell'immagine flash dell'emulatore. Ciò che l'emulatore poi mostra non è verificato automaticamente: il QEMU di Espressif ha bisogno della sua finestra. Dall'ottobre 2026 il firmware parte da Setup: scegliete Run Cartridge, poi cart0.</a:t>
             </a:r>
             <a:endParaRPr lang="en-US" dirty="0"/>
@@ -833,6 +837,7 @@
             <a:r>
               <a:rPr lang="en-US" dirty="0"/>
               <a:t>Lo stesso programma sul kit. Il firmware si scrive una volta, via USB; dopo, le cartucce viaggiano sul Wi-Fi. Il comando di caricamento è quello usato per PRG32-QT con l'indirizzo della scheda. È l'unico host che i test automatici non eseguono: provatelo, e riferite ciò che vedete.
+DA UTILIZZARE OGGI: gli strumenti di PRG32 (si usa, non si studia, in questo corso).
 Per il docente: Non eseguito dai test: sulla macchina di prova non c'è una scheda. La cartuccia per l'architettura esp32c6 è compilata dai test; i passi sono quelli della documentazione di PRG32. Se la porta seriale non viene trovata, passatela esplicitamente. Per usare il Wi-Fi dell'aula: python3 -m prg32 wifi set --ssid NOME --password PASSWORD --mode sta.</a:t>
             </a:r>
             <a:endParaRPr lang="en-US" dirty="0"/>
@@ -922,6 +927,7 @@
             <a:r>
               <a:rPr lang="en-US" dirty="0"/>
               <a:t>I cinque sintomi più comuni, che cosa significa ciascuno, e che cosa fare. Leggete il messaggio prima di cambiare qualcosa: quasi sempre nomina la causa.
+DA UTILIZZARE OGGI: gli strumenti di PRG32 (si usa, non si studia, in questo corso).
 Per il docente: Le prime tre righe coprono la maggior parte dei casi. Quando chiedete aiuto, incollate il comando e l'intero messaggio come testo. docs/usage/troubleshooting.md del repository di PRG32 ha l'elenco completo.</a:t>
             </a:r>
             <a:endParaRPr lang="en-US" dirty="0"/>
@@ -1189,6 +1195,7 @@
             <a:r>
               <a:rPr lang="en-US" dirty="0"/>
               <a:t>Un pixel per frame è troppo veloce, e zero non è un movimento: alla palla servono 0,375 pixel per frame. Il trucco è memorizzare la posizione moltiplicata per 256. ball_update somma 96 a ogni frame, e 96 diviso 256 fa 0,375. A ball_draw servono pixel interi, quindi scorre il valore a destra di 8 posizioni, cioè lo divide per 256, con srai. Tutta l'aritmetica è fatta con istruzioni intere. Il suffisso _q8 nei nomi ricorda che il valore porta otto bit frazionari.
+DA COMPRENDERE OGGI: la virgola fissa.
 Per il docente: Scritto per questa lezione nello stile degli esempi del libro di PRG32; la stessa idea sta dietro prg32_playfield_parallax(layer, x_q8, y_q8) nell'API di PRG32. Eseguirlo con SPEED_Q8 = 96, poi 16, poi 1.</a:t>
             </a:r>
             <a:endParaRPr lang="en-US" dirty="0"/>
@@ -1278,6 +1285,7 @@
             <a:r>
               <a:rPr lang="en-US" dirty="0"/>
               <a:t>La palla vista bit per bit. La parola 0x00002A60 si divide in 24 bit di parte intera, 0x2A, cioè 42 pixel, e 8 bit di frazione, 0x60, cioè 96/256 = 0,375. Come intero la parola vale 10848, e 10848 diviso 256 fa 42,375. La tabella dà le regole: somma e sottrazione funzionano come per gli interi, perché le virgole sono allineate; per ottenere pixel interi si scorre a destra di f; dopo una moltiplicazione si scorre a destra di f, perché il prodotto ha il doppio dei bit frazionari.
+DA COMPRENDERE OGGI: la virgola fissa.
 Per il docente: 42 x 256 = 10752; 10752 + 96 = 10848 = 0x2A60. Dopo un altro frame il valore è 0x2AC0 (42,75), poi 0x2B20 (43,125): la palla attraversa il confine di un pixel ogni due o tre frame.</a:t>
             </a:r>
             <a:endParaRPr lang="en-US" dirty="0"/>
@@ -1367,6 +1375,7 @@
             <a:r>
               <a:rPr lang="en-US" dirty="0"/>
               <a:t>I numeri in virgola mobile si comportano quasi come i numeri reali, e il «quasi» causa bug veri. 0,1 non ha uno sviluppo binario finito, quindi è memorizzato in modo approssimato, e 0,1 più 0,2 non fa esattamente 0,3, come mostra il codice. Da qui la regola: mai confrontare per uguaglianza due risultati in virgola mobile; si confronta la loro differenza con una tolleranza. La somma non è nemmeno associativa. Per il denaro e per le posizioni in un gioco gli interi scalati, cioè la virgola fissa, sono spesso lo strumento giusto.
+DA COMPRENDERE OGGI: la virgola mobile IEEE 754.
 Per il docente: La somma in doppia precisione 0,1 + 0,2 vale 0,30000000000000004. Provatela in qualunque linguaggio.</a:t>
             </a:r>
             <a:endParaRPr lang="en-US" dirty="0"/>
@@ -1456,6 +1465,7 @@
             <a:r>
               <a:rPr lang="en-US" dirty="0"/>
               <a:t>Una pagina del programma completo, esattamente com'è nel repository. Leggetelo dall'inizio: l'intestazione dice che cosa mostra il programma e come compilarlo; seguono le tre funzioni init, update e draw, poi i dati. Le righe incontrate nei listati della lezione hanno qui gli stessi commenti.
+DA UTILIZZARE OGGI: il programma completo (si usa, non si studia, in questo corso).
 Per il docente: code/l06.S, come viene compilato ed eseguito dai test. I commenti fanno parte del programma, e sono in inglese come in tutti i listati: leggeteli con il codice.</a:t>
             </a:r>
             <a:endParaRPr lang="en-US" dirty="0"/>
@@ -1545,6 +1555,7 @@
             <a:r>
               <a:rPr lang="en-US" dirty="0"/>
               <a:t>Una pagina del programma completo, esattamente com'è nel repository. Leggetelo dall'inizio: l'intestazione dice che cosa mostra il programma e come compilarlo; seguono le tre funzioni init, update e draw, poi i dati. Le righe incontrate nei listati della lezione hanno qui gli stessi commenti.
+DA UTILIZZARE OGGI: il programma completo (si usa, non si studia, in questo corso).
 Per il docente: code/l06.S, come viene compilato ed eseguito dai test. I commenti fanno parte del programma, e sono in inglese come in tutti i listati: leggeteli con il codice.</a:t>
             </a:r>
             <a:endParaRPr lang="en-US" dirty="0"/>
@@ -1634,6 +1645,7 @@
             <a:r>
               <a:rPr lang="en-US" dirty="0"/>
               <a:t>Una pagina del programma completo, esattamente com'è nel repository. Leggetelo dall'inizio: l'intestazione dice che cosa mostra il programma e come compilarlo; seguono le tre funzioni init, update e draw, poi i dati. Le righe incontrate nei listati della lezione hanno qui gli stessi commenti.
+DA UTILIZZARE OGGI: il programma completo (si usa, non si studia, in questo corso).
 Per il docente: code/l06.S, come viene compilato ed eseguito dai test. I commenti fanno parte del programma, e sono in inglese come in tutti i listati: leggeteli con il codice.</a:t>
             </a:r>
             <a:endParaRPr lang="en-US" dirty="0"/>
@@ -2804,6 +2816,420 @@
       </p:pic>
       <p:sp>
         <p:nvSpPr>
+          <p:cNvPr id="14" name="Shape 11"/>
+          <p:cNvSpPr/>
+          <p:nvPr/>
+        </p:nvSpPr>
+        <p:spPr>
+          <a:xfrm>
+            <a:off x="8910777" y="91440"/>
+            <a:ext cx="2732278" cy="274320"/>
+          </a:xfrm>
+          <a:prstGeom prst="rect">
+            <a:avLst/>
+          </a:prstGeom>
+          <a:solidFill>
+            <a:srgbClr val="F3E8FF"/>
+          </a:solidFill>
+          <a:ln w="12700">
+            <a:solidFill>
+              <a:srgbClr val="7E22CE"/>
+            </a:solidFill>
+            <a:prstDash val="dash"/>
+          </a:ln>
+        </p:spPr>
+      </p:sp>
+      <p:sp>
+        <p:nvSpPr>
+          <p:cNvPr id="15" name="Shape 12"/>
+          <p:cNvSpPr/>
+          <p:nvPr/>
+        </p:nvSpPr>
+        <p:spPr>
+          <a:xfrm>
+            <a:off x="8938209" y="128016"/>
+            <a:ext cx="45720" cy="45720"/>
+          </a:xfrm>
+          <a:prstGeom prst="rect">
+            <a:avLst/>
+          </a:prstGeom>
+          <a:solidFill>
+            <a:srgbClr val="7E22CE"/>
+          </a:solidFill>
+          <a:ln w="12700">
+            <a:solidFill>
+              <a:srgbClr val="7E22CE"/>
+            </a:solidFill>
+            <a:prstDash val="solid"/>
+          </a:ln>
+        </p:spPr>
+      </p:sp>
+      <p:sp>
+        <p:nvSpPr>
+          <p:cNvPr id="16" name="Shape 13"/>
+          <p:cNvSpPr/>
+          <p:nvPr/>
+        </p:nvSpPr>
+        <p:spPr>
+          <a:xfrm>
+            <a:off x="8938209" y="205740"/>
+            <a:ext cx="45720" cy="45720"/>
+          </a:xfrm>
+          <a:prstGeom prst="rect">
+            <a:avLst/>
+          </a:prstGeom>
+          <a:solidFill>
+            <a:srgbClr val="7E22CE"/>
+          </a:solidFill>
+          <a:ln w="12700">
+            <a:solidFill>
+              <a:srgbClr val="7E22CE"/>
+            </a:solidFill>
+            <a:prstDash val="solid"/>
+          </a:ln>
+        </p:spPr>
+      </p:sp>
+      <p:sp>
+        <p:nvSpPr>
+          <p:cNvPr id="17" name="Shape 14"/>
+          <p:cNvSpPr/>
+          <p:nvPr/>
+        </p:nvSpPr>
+        <p:spPr>
+          <a:xfrm>
+            <a:off x="8938209" y="283464"/>
+            <a:ext cx="45720" cy="45720"/>
+          </a:xfrm>
+          <a:prstGeom prst="rect">
+            <a:avLst/>
+          </a:prstGeom>
+          <a:solidFill>
+            <a:srgbClr val="7E22CE"/>
+          </a:solidFill>
+          <a:ln w="12700">
+            <a:solidFill>
+              <a:srgbClr val="7E22CE"/>
+            </a:solidFill>
+            <a:prstDash val="solid"/>
+          </a:ln>
+        </p:spPr>
+      </p:sp>
+      <p:pic>
+        <p:nvPicPr>
+          <p:cNvPr id="18" name="Image 1" descr="preencoded.png">    </p:cNvPr>
+          <p:cNvPicPr>
+            <a:picLocks noChangeAspect="1"/>
+          </p:cNvPicPr>
+          <p:nvPr/>
+        </p:nvPicPr>
+        <p:blipFill>
+          <a:blip r:embed="rId2"/>
+          <a:stretch>
+            <a:fillRect/>
+          </a:stretch>
+        </p:blipFill>
+        <p:spPr>
+          <a:xfrm>
+            <a:off x="9038793" y="128016"/>
+            <a:ext cx="201168" cy="201168"/>
+          </a:xfrm>
+          <a:prstGeom prst="rect">
+            <a:avLst/>
+          </a:prstGeom>
+        </p:spPr>
+      </p:pic>
+      <p:sp>
+        <p:nvSpPr>
+          <p:cNvPr id="19" name="Text 15"/>
+          <p:cNvSpPr txBox="1"/>
+          <p:nvPr/>
+        </p:nvSpPr>
+        <p:spPr>
+          <a:xfrm>
+            <a:off x="9294825" y="91440"/>
+            <a:ext cx="2311654" cy="274320"/>
+          </a:xfrm>
+          <a:prstGeom prst="rect">
+            <a:avLst/>
+          </a:prstGeom>
+          <a:noFill/>
+          <a:ln/>
+        </p:spPr>
+        <p:txBody>
+          <a:bodyPr wrap="square" lIns="0" tIns="0" rIns="0" bIns="0" rtlCol="0" anchor="ctr"/>
+          <a:lstStyle/>
+          <a:p>
+            <a:pPr indent="0" marL="0">
+              <a:buNone/>
+            </a:pPr>
+            <a:r>
+              <a:rPr lang="en-US" sz="1100" b="1" dirty="0">
+                <a:solidFill>
+                  <a:srgbClr val="6B21A8"/>
+                </a:solidFill>
+                <a:latin typeface="Calibri" pitchFamily="34" charset="0"/>
+                <a:ea typeface="Calibri" pitchFamily="34" charset="-122"/>
+                <a:cs typeface="Calibri" pitchFamily="34" charset="-120"/>
+              </a:rPr>
+              <a:t>DA COMPRENDERE PIÙ AVANTI</a:t>
+            </a:r>
+            <a:endParaRPr lang="en-US" sz="1100" dirty="0"/>
+          </a:p>
+        </p:txBody>
+      </p:sp>
+      <p:sp>
+        <p:nvSpPr>
+          <p:cNvPr id="20" name="Shape 16"/>
+          <p:cNvSpPr/>
+          <p:nvPr/>
+        </p:nvSpPr>
+        <p:spPr>
+          <a:xfrm>
+            <a:off x="6675069" y="91440"/>
+            <a:ext cx="2125980" cy="274320"/>
+          </a:xfrm>
+          <a:prstGeom prst="rect">
+            <a:avLst/>
+          </a:prstGeom>
+          <a:solidFill>
+            <a:srgbClr val="FEF3C7"/>
+          </a:solidFill>
+          <a:ln w="12700">
+            <a:solidFill>
+              <a:srgbClr val="B45309"/>
+            </a:solidFill>
+            <a:prstDash val="solid"/>
+          </a:ln>
+        </p:spPr>
+      </p:sp>
+      <p:sp>
+        <p:nvSpPr>
+          <p:cNvPr id="21" name="Shape 17"/>
+          <p:cNvSpPr/>
+          <p:nvPr/>
+        </p:nvSpPr>
+        <p:spPr>
+          <a:xfrm>
+            <a:off x="6675069" y="91440"/>
+            <a:ext cx="27432" cy="274320"/>
+          </a:xfrm>
+          <a:prstGeom prst="rect">
+            <a:avLst/>
+          </a:prstGeom>
+          <a:solidFill>
+            <a:srgbClr val="B45309"/>
+          </a:solidFill>
+          <a:ln w="12700">
+            <a:solidFill>
+              <a:srgbClr val="B45309"/>
+            </a:solidFill>
+            <a:prstDash val="solid"/>
+          </a:ln>
+        </p:spPr>
+      </p:sp>
+      <p:sp>
+        <p:nvSpPr>
+          <p:cNvPr id="22" name="Shape 18"/>
+          <p:cNvSpPr/>
+          <p:nvPr/>
+        </p:nvSpPr>
+        <p:spPr>
+          <a:xfrm>
+            <a:off x="6729933" y="91440"/>
+            <a:ext cx="27432" cy="274320"/>
+          </a:xfrm>
+          <a:prstGeom prst="rect">
+            <a:avLst/>
+          </a:prstGeom>
+          <a:solidFill>
+            <a:srgbClr val="B45309"/>
+          </a:solidFill>
+          <a:ln w="12700">
+            <a:solidFill>
+              <a:srgbClr val="B45309"/>
+            </a:solidFill>
+            <a:prstDash val="solid"/>
+          </a:ln>
+        </p:spPr>
+      </p:sp>
+      <p:pic>
+        <p:nvPicPr>
+          <p:cNvPr id="23" name="Image 2" descr="preencoded.png">    </p:cNvPr>
+          <p:cNvPicPr>
+            <a:picLocks noChangeAspect="1"/>
+          </p:cNvPicPr>
+          <p:nvPr/>
+        </p:nvPicPr>
+        <p:blipFill>
+          <a:blip r:embed="rId3"/>
+          <a:stretch>
+            <a:fillRect/>
+          </a:stretch>
+        </p:blipFill>
+        <p:spPr>
+          <a:xfrm>
+            <a:off x="6803085" y="128016"/>
+            <a:ext cx="201168" cy="201168"/>
+          </a:xfrm>
+          <a:prstGeom prst="rect">
+            <a:avLst/>
+          </a:prstGeom>
+        </p:spPr>
+      </p:pic>
+      <p:sp>
+        <p:nvSpPr>
+          <p:cNvPr id="24" name="Text 19"/>
+          <p:cNvSpPr txBox="1"/>
+          <p:nvPr/>
+        </p:nvSpPr>
+        <p:spPr>
+          <a:xfrm>
+            <a:off x="7059117" y="91440"/>
+            <a:ext cx="1705356" cy="274320"/>
+          </a:xfrm>
+          <a:prstGeom prst="rect">
+            <a:avLst/>
+          </a:prstGeom>
+          <a:noFill/>
+          <a:ln/>
+        </p:spPr>
+        <p:txBody>
+          <a:bodyPr wrap="square" lIns="0" tIns="0" rIns="0" bIns="0" rtlCol="0" anchor="ctr"/>
+          <a:lstStyle/>
+          <a:p>
+            <a:pPr indent="0" marL="0">
+              <a:buNone/>
+            </a:pPr>
+            <a:r>
+              <a:rPr lang="en-US" sz="1100" b="1" dirty="0">
+                <a:solidFill>
+                  <a:srgbClr val="92400E"/>
+                </a:solidFill>
+                <a:latin typeface="Calibri" pitchFamily="34" charset="0"/>
+                <a:ea typeface="Calibri" pitchFamily="34" charset="-122"/>
+                <a:cs typeface="Calibri" pitchFamily="34" charset="-120"/>
+              </a:rPr>
+              <a:t>DA UTILIZZARE OGGI</a:t>
+            </a:r>
+            <a:endParaRPr lang="en-US" sz="1100" dirty="0"/>
+          </a:p>
+        </p:txBody>
+      </p:sp>
+      <p:sp>
+        <p:nvSpPr>
+          <p:cNvPr id="25" name="Shape 20"/>
+          <p:cNvSpPr/>
+          <p:nvPr/>
+        </p:nvSpPr>
+        <p:spPr>
+          <a:xfrm>
+            <a:off x="4352747" y="91440"/>
+            <a:ext cx="2212594" cy="274320"/>
+          </a:xfrm>
+          <a:prstGeom prst="rect">
+            <a:avLst/>
+          </a:prstGeom>
+          <a:solidFill>
+            <a:srgbClr val="E0F2FE"/>
+          </a:solidFill>
+          <a:ln w="12700">
+            <a:solidFill>
+              <a:srgbClr val="0369A1"/>
+            </a:solidFill>
+            <a:prstDash val="solid"/>
+          </a:ln>
+        </p:spPr>
+      </p:sp>
+      <p:sp>
+        <p:nvSpPr>
+          <p:cNvPr id="26" name="Shape 21"/>
+          <p:cNvSpPr/>
+          <p:nvPr/>
+        </p:nvSpPr>
+        <p:spPr>
+          <a:xfrm>
+            <a:off x="4352747" y="91440"/>
+            <a:ext cx="73152" cy="274320"/>
+          </a:xfrm>
+          <a:prstGeom prst="rect">
+            <a:avLst/>
+          </a:prstGeom>
+          <a:solidFill>
+            <a:srgbClr val="0369A1"/>
+          </a:solidFill>
+          <a:ln w="12700">
+            <a:solidFill>
+              <a:srgbClr val="0369A1"/>
+            </a:solidFill>
+            <a:prstDash val="solid"/>
+          </a:ln>
+        </p:spPr>
+      </p:sp>
+      <p:pic>
+        <p:nvPicPr>
+          <p:cNvPr id="27" name="Image 3" descr="preencoded.png">    </p:cNvPr>
+          <p:cNvPicPr>
+            <a:picLocks noChangeAspect="1"/>
+          </p:cNvPicPr>
+          <p:nvPr/>
+        </p:nvPicPr>
+        <p:blipFill>
+          <a:blip r:embed="rId4"/>
+          <a:stretch>
+            <a:fillRect/>
+          </a:stretch>
+        </p:blipFill>
+        <p:spPr>
+          <a:xfrm>
+            <a:off x="4480763" y="128016"/>
+            <a:ext cx="201168" cy="201168"/>
+          </a:xfrm>
+          <a:prstGeom prst="rect">
+            <a:avLst/>
+          </a:prstGeom>
+        </p:spPr>
+      </p:pic>
+      <p:sp>
+        <p:nvSpPr>
+          <p:cNvPr id="28" name="Text 22"/>
+          <p:cNvSpPr txBox="1"/>
+          <p:nvPr/>
+        </p:nvSpPr>
+        <p:spPr>
+          <a:xfrm>
+            <a:off x="4736795" y="91440"/>
+            <a:ext cx="1791970" cy="274320"/>
+          </a:xfrm>
+          <a:prstGeom prst="rect">
+            <a:avLst/>
+          </a:prstGeom>
+          <a:noFill/>
+          <a:ln/>
+        </p:spPr>
+        <p:txBody>
+          <a:bodyPr wrap="square" lIns="0" tIns="0" rIns="0" bIns="0" rtlCol="0" anchor="ctr"/>
+          <a:lstStyle/>
+          <a:p>
+            <a:pPr indent="0" marL="0">
+              <a:buNone/>
+            </a:pPr>
+            <a:r>
+              <a:rPr lang="en-US" sz="1100" b="1" dirty="0">
+                <a:solidFill>
+                  <a:srgbClr val="075985"/>
+                </a:solidFill>
+                <a:latin typeface="Calibri" pitchFamily="34" charset="0"/>
+                <a:ea typeface="Calibri" pitchFamily="34" charset="-122"/>
+                <a:cs typeface="Calibri" pitchFamily="34" charset="-120"/>
+              </a:rPr>
+              <a:t>DA COMPRENDERE OGGI</a:t>
+            </a:r>
+            <a:endParaRPr lang="en-US" sz="1100" dirty="0"/>
+          </a:p>
+        </p:txBody>
+      </p:sp>
+      <p:sp>
+        <p:nvSpPr>
           <p:cNvPr id="25" name="Slide Number Placeholder 0"/>
           <p:cNvSpPr>
             <a:spLocks noGrp="1"/>
@@ -3606,6 +4032,158 @@
       </p:sp>
       <p:sp>
         <p:nvSpPr>
+          <p:cNvPr id="17" name="Shape 15"/>
+          <p:cNvSpPr/>
+          <p:nvPr/>
+        </p:nvSpPr>
+        <p:spPr>
+          <a:xfrm>
+            <a:off x="7875600" y="91440"/>
+            <a:ext cx="3767455" cy="274320"/>
+          </a:xfrm>
+          <a:prstGeom prst="rect">
+            <a:avLst/>
+          </a:prstGeom>
+          <a:solidFill>
+            <a:srgbClr val="FEF3C7"/>
+          </a:solidFill>
+          <a:ln w="12700">
+            <a:solidFill>
+              <a:srgbClr val="B45309"/>
+            </a:solidFill>
+            <a:prstDash val="solid"/>
+          </a:ln>
+        </p:spPr>
+      </p:sp>
+      <p:sp>
+        <p:nvSpPr>
+          <p:cNvPr id="18" name="Shape 16"/>
+          <p:cNvSpPr/>
+          <p:nvPr/>
+        </p:nvSpPr>
+        <p:spPr>
+          <a:xfrm>
+            <a:off x="7875600" y="91440"/>
+            <a:ext cx="27432" cy="274320"/>
+          </a:xfrm>
+          <a:prstGeom prst="rect">
+            <a:avLst/>
+          </a:prstGeom>
+          <a:solidFill>
+            <a:srgbClr val="B45309"/>
+          </a:solidFill>
+          <a:ln w="12700">
+            <a:solidFill>
+              <a:srgbClr val="B45309"/>
+            </a:solidFill>
+            <a:prstDash val="solid"/>
+          </a:ln>
+        </p:spPr>
+      </p:sp>
+      <p:sp>
+        <p:nvSpPr>
+          <p:cNvPr id="19" name="Shape 17"/>
+          <p:cNvSpPr/>
+          <p:nvPr/>
+        </p:nvSpPr>
+        <p:spPr>
+          <a:xfrm>
+            <a:off x="7930464" y="91440"/>
+            <a:ext cx="27432" cy="274320"/>
+          </a:xfrm>
+          <a:prstGeom prst="rect">
+            <a:avLst/>
+          </a:prstGeom>
+          <a:solidFill>
+            <a:srgbClr val="B45309"/>
+          </a:solidFill>
+          <a:ln w="12700">
+            <a:solidFill>
+              <a:srgbClr val="B45309"/>
+            </a:solidFill>
+            <a:prstDash val="solid"/>
+          </a:ln>
+        </p:spPr>
+      </p:sp>
+      <p:pic>
+        <p:nvPicPr>
+          <p:cNvPr id="20" name="Image 0" descr="preencoded.png">    </p:cNvPr>
+          <p:cNvPicPr>
+            <a:picLocks noChangeAspect="1"/>
+          </p:cNvPicPr>
+          <p:nvPr/>
+        </p:nvPicPr>
+        <p:blipFill>
+          <a:blip r:embed="rId1"/>
+          <a:stretch>
+            <a:fillRect/>
+          </a:stretch>
+        </p:blipFill>
+        <p:spPr>
+          <a:xfrm>
+            <a:off x="8003616" y="128016"/>
+            <a:ext cx="201168" cy="201168"/>
+          </a:xfrm>
+          <a:prstGeom prst="rect">
+            <a:avLst/>
+          </a:prstGeom>
+        </p:spPr>
+      </p:pic>
+      <p:sp>
+        <p:nvSpPr>
+          <p:cNvPr id="21" name="Text 18"/>
+          <p:cNvSpPr txBox="1"/>
+          <p:nvPr/>
+        </p:nvSpPr>
+        <p:spPr>
+          <a:xfrm>
+            <a:off x="8259648" y="91440"/>
+            <a:ext cx="3346831" cy="274320"/>
+          </a:xfrm>
+          <a:prstGeom prst="rect">
+            <a:avLst/>
+          </a:prstGeom>
+          <a:noFill/>
+          <a:ln/>
+        </p:spPr>
+        <p:txBody>
+          <a:bodyPr wrap="square" lIns="0" tIns="0" rIns="0" bIns="0" rtlCol="0" anchor="ctr"/>
+          <a:lstStyle/>
+          <a:p>
+            <a:pPr indent="0" marL="0">
+              <a:buNone/>
+            </a:pPr>
+            <a:r>
+              <a:rPr lang="en-US" sz="1100" b="1" dirty="0">
+                <a:solidFill>
+                  <a:srgbClr val="92400E"/>
+                </a:solidFill>
+                <a:latin typeface="Calibri" pitchFamily="34" charset="0"/>
+                <a:ea typeface="Calibri" pitchFamily="34" charset="-122"/>
+                <a:cs typeface="Calibri" pitchFamily="34" charset="-120"/>
+              </a:rPr>
+              <a:t>DA UTILIZZARE OGGI</a:t>
+            </a:r>
+            <a:pPr indent="0" marL="0">
+              <a:buNone/>
+            </a:pPr>
+            <a:r>
+              <a:rPr lang="en-US" sz="1100" dirty="0">
+                <a:solidFill>
+                  <a:srgbClr val="92400E"/>
+                </a:solidFill>
+                <a:latin typeface="Calibri" pitchFamily="34" charset="0"/>
+                <a:ea typeface="Calibri" pitchFamily="34" charset="-122"/>
+                <a:cs typeface="Calibri" pitchFamily="34" charset="-120"/>
+              </a:rPr>
+              <a:t> · gli strumenti di PRG32</a:t>
+            </a:r>
+            <a:endParaRPr lang="en-US" sz="1100" dirty="0"/>
+          </a:p>
+        </p:txBody>
+      </p:sp>
+      <p:sp>
+        <p:nvSpPr>
           <p:cNvPr id="25" name="Slide Number Placeholder 0"/>
           <p:cNvSpPr>
             <a:spLocks noGrp="1"/>
@@ -4442,6 +5020,158 @@
       </p:sp>
       <p:sp>
         <p:nvSpPr>
+          <p:cNvPr id="17" name="Shape 15"/>
+          <p:cNvSpPr/>
+          <p:nvPr/>
+        </p:nvSpPr>
+        <p:spPr>
+          <a:xfrm>
+            <a:off x="7875600" y="91440"/>
+            <a:ext cx="3767455" cy="274320"/>
+          </a:xfrm>
+          <a:prstGeom prst="rect">
+            <a:avLst/>
+          </a:prstGeom>
+          <a:solidFill>
+            <a:srgbClr val="FEF3C7"/>
+          </a:solidFill>
+          <a:ln w="12700">
+            <a:solidFill>
+              <a:srgbClr val="B45309"/>
+            </a:solidFill>
+            <a:prstDash val="solid"/>
+          </a:ln>
+        </p:spPr>
+      </p:sp>
+      <p:sp>
+        <p:nvSpPr>
+          <p:cNvPr id="18" name="Shape 16"/>
+          <p:cNvSpPr/>
+          <p:nvPr/>
+        </p:nvSpPr>
+        <p:spPr>
+          <a:xfrm>
+            <a:off x="7875600" y="91440"/>
+            <a:ext cx="27432" cy="274320"/>
+          </a:xfrm>
+          <a:prstGeom prst="rect">
+            <a:avLst/>
+          </a:prstGeom>
+          <a:solidFill>
+            <a:srgbClr val="B45309"/>
+          </a:solidFill>
+          <a:ln w="12700">
+            <a:solidFill>
+              <a:srgbClr val="B45309"/>
+            </a:solidFill>
+            <a:prstDash val="solid"/>
+          </a:ln>
+        </p:spPr>
+      </p:sp>
+      <p:sp>
+        <p:nvSpPr>
+          <p:cNvPr id="19" name="Shape 17"/>
+          <p:cNvSpPr/>
+          <p:nvPr/>
+        </p:nvSpPr>
+        <p:spPr>
+          <a:xfrm>
+            <a:off x="7930464" y="91440"/>
+            <a:ext cx="27432" cy="274320"/>
+          </a:xfrm>
+          <a:prstGeom prst="rect">
+            <a:avLst/>
+          </a:prstGeom>
+          <a:solidFill>
+            <a:srgbClr val="B45309"/>
+          </a:solidFill>
+          <a:ln w="12700">
+            <a:solidFill>
+              <a:srgbClr val="B45309"/>
+            </a:solidFill>
+            <a:prstDash val="solid"/>
+          </a:ln>
+        </p:spPr>
+      </p:sp>
+      <p:pic>
+        <p:nvPicPr>
+          <p:cNvPr id="20" name="Image 0" descr="preencoded.png">    </p:cNvPr>
+          <p:cNvPicPr>
+            <a:picLocks noChangeAspect="1"/>
+          </p:cNvPicPr>
+          <p:nvPr/>
+        </p:nvPicPr>
+        <p:blipFill>
+          <a:blip r:embed="rId1"/>
+          <a:stretch>
+            <a:fillRect/>
+          </a:stretch>
+        </p:blipFill>
+        <p:spPr>
+          <a:xfrm>
+            <a:off x="8003616" y="128016"/>
+            <a:ext cx="201168" cy="201168"/>
+          </a:xfrm>
+          <a:prstGeom prst="rect">
+            <a:avLst/>
+          </a:prstGeom>
+        </p:spPr>
+      </p:pic>
+      <p:sp>
+        <p:nvSpPr>
+          <p:cNvPr id="21" name="Text 18"/>
+          <p:cNvSpPr txBox="1"/>
+          <p:nvPr/>
+        </p:nvSpPr>
+        <p:spPr>
+          <a:xfrm>
+            <a:off x="8259648" y="91440"/>
+            <a:ext cx="3346831" cy="274320"/>
+          </a:xfrm>
+          <a:prstGeom prst="rect">
+            <a:avLst/>
+          </a:prstGeom>
+          <a:noFill/>
+          <a:ln/>
+        </p:spPr>
+        <p:txBody>
+          <a:bodyPr wrap="square" lIns="0" tIns="0" rIns="0" bIns="0" rtlCol="0" anchor="ctr"/>
+          <a:lstStyle/>
+          <a:p>
+            <a:pPr indent="0" marL="0">
+              <a:buNone/>
+            </a:pPr>
+            <a:r>
+              <a:rPr lang="en-US" sz="1100" b="1" dirty="0">
+                <a:solidFill>
+                  <a:srgbClr val="92400E"/>
+                </a:solidFill>
+                <a:latin typeface="Calibri" pitchFamily="34" charset="0"/>
+                <a:ea typeface="Calibri" pitchFamily="34" charset="-122"/>
+                <a:cs typeface="Calibri" pitchFamily="34" charset="-120"/>
+              </a:rPr>
+              <a:t>DA UTILIZZARE OGGI</a:t>
+            </a:r>
+            <a:pPr indent="0" marL="0">
+              <a:buNone/>
+            </a:pPr>
+            <a:r>
+              <a:rPr lang="en-US" sz="1100" dirty="0">
+                <a:solidFill>
+                  <a:srgbClr val="92400E"/>
+                </a:solidFill>
+                <a:latin typeface="Calibri" pitchFamily="34" charset="0"/>
+                <a:ea typeface="Calibri" pitchFamily="34" charset="-122"/>
+                <a:cs typeface="Calibri" pitchFamily="34" charset="-120"/>
+              </a:rPr>
+              <a:t> · gli strumenti di PRG32</a:t>
+            </a:r>
+            <a:endParaRPr lang="en-US" sz="1100" dirty="0"/>
+          </a:p>
+        </p:txBody>
+      </p:sp>
+      <p:sp>
+        <p:nvSpPr>
           <p:cNvPr id="25" name="Slide Number Placeholder 0"/>
           <p:cNvSpPr>
             <a:spLocks noGrp="1"/>
@@ -5271,6 +6001,158 @@
                 <a:cs typeface="Calibri" pitchFamily="34" charset="-120"/>
               </a:rPr>
               <a:t>Schermo nero: confrontate il cablaggio del display con il firmware</a:t>
+            </a:r>
+            <a:endParaRPr lang="en-US" sz="1100" dirty="0"/>
+          </a:p>
+        </p:txBody>
+      </p:sp>
+      <p:sp>
+        <p:nvSpPr>
+          <p:cNvPr id="17" name="Shape 15"/>
+          <p:cNvSpPr/>
+          <p:nvPr/>
+        </p:nvSpPr>
+        <p:spPr>
+          <a:xfrm>
+            <a:off x="7875600" y="91440"/>
+            <a:ext cx="3767455" cy="274320"/>
+          </a:xfrm>
+          <a:prstGeom prst="rect">
+            <a:avLst/>
+          </a:prstGeom>
+          <a:solidFill>
+            <a:srgbClr val="FEF3C7"/>
+          </a:solidFill>
+          <a:ln w="12700">
+            <a:solidFill>
+              <a:srgbClr val="B45309"/>
+            </a:solidFill>
+            <a:prstDash val="solid"/>
+          </a:ln>
+        </p:spPr>
+      </p:sp>
+      <p:sp>
+        <p:nvSpPr>
+          <p:cNvPr id="18" name="Shape 16"/>
+          <p:cNvSpPr/>
+          <p:nvPr/>
+        </p:nvSpPr>
+        <p:spPr>
+          <a:xfrm>
+            <a:off x="7875600" y="91440"/>
+            <a:ext cx="27432" cy="274320"/>
+          </a:xfrm>
+          <a:prstGeom prst="rect">
+            <a:avLst/>
+          </a:prstGeom>
+          <a:solidFill>
+            <a:srgbClr val="B45309"/>
+          </a:solidFill>
+          <a:ln w="12700">
+            <a:solidFill>
+              <a:srgbClr val="B45309"/>
+            </a:solidFill>
+            <a:prstDash val="solid"/>
+          </a:ln>
+        </p:spPr>
+      </p:sp>
+      <p:sp>
+        <p:nvSpPr>
+          <p:cNvPr id="19" name="Shape 17"/>
+          <p:cNvSpPr/>
+          <p:nvPr/>
+        </p:nvSpPr>
+        <p:spPr>
+          <a:xfrm>
+            <a:off x="7930464" y="91440"/>
+            <a:ext cx="27432" cy="274320"/>
+          </a:xfrm>
+          <a:prstGeom prst="rect">
+            <a:avLst/>
+          </a:prstGeom>
+          <a:solidFill>
+            <a:srgbClr val="B45309"/>
+          </a:solidFill>
+          <a:ln w="12700">
+            <a:solidFill>
+              <a:srgbClr val="B45309"/>
+            </a:solidFill>
+            <a:prstDash val="solid"/>
+          </a:ln>
+        </p:spPr>
+      </p:sp>
+      <p:pic>
+        <p:nvPicPr>
+          <p:cNvPr id="20" name="Image 0" descr="preencoded.png">    </p:cNvPr>
+          <p:cNvPicPr>
+            <a:picLocks noChangeAspect="1"/>
+          </p:cNvPicPr>
+          <p:nvPr/>
+        </p:nvPicPr>
+        <p:blipFill>
+          <a:blip r:embed="rId1"/>
+          <a:stretch>
+            <a:fillRect/>
+          </a:stretch>
+        </p:blipFill>
+        <p:spPr>
+          <a:xfrm>
+            <a:off x="8003616" y="128016"/>
+            <a:ext cx="201168" cy="201168"/>
+          </a:xfrm>
+          <a:prstGeom prst="rect">
+            <a:avLst/>
+          </a:prstGeom>
+        </p:spPr>
+      </p:pic>
+      <p:sp>
+        <p:nvSpPr>
+          <p:cNvPr id="21" name="Text 18"/>
+          <p:cNvSpPr txBox="1"/>
+          <p:nvPr/>
+        </p:nvSpPr>
+        <p:spPr>
+          <a:xfrm>
+            <a:off x="8259648" y="91440"/>
+            <a:ext cx="3346831" cy="274320"/>
+          </a:xfrm>
+          <a:prstGeom prst="rect">
+            <a:avLst/>
+          </a:prstGeom>
+          <a:noFill/>
+          <a:ln/>
+        </p:spPr>
+        <p:txBody>
+          <a:bodyPr wrap="square" lIns="0" tIns="0" rIns="0" bIns="0" rtlCol="0" anchor="ctr"/>
+          <a:lstStyle/>
+          <a:p>
+            <a:pPr indent="0" marL="0">
+              <a:buNone/>
+            </a:pPr>
+            <a:r>
+              <a:rPr lang="en-US" sz="1100" b="1" dirty="0">
+                <a:solidFill>
+                  <a:srgbClr val="92400E"/>
+                </a:solidFill>
+                <a:latin typeface="Calibri" pitchFamily="34" charset="0"/>
+                <a:ea typeface="Calibri" pitchFamily="34" charset="-122"/>
+                <a:cs typeface="Calibri" pitchFamily="34" charset="-120"/>
+              </a:rPr>
+              <a:t>DA UTILIZZARE OGGI</a:t>
+            </a:r>
+            <a:pPr indent="0" marL="0">
+              <a:buNone/>
+            </a:pPr>
+            <a:r>
+              <a:rPr lang="en-US" sz="1100" dirty="0">
+                <a:solidFill>
+                  <a:srgbClr val="92400E"/>
+                </a:solidFill>
+                <a:latin typeface="Calibri" pitchFamily="34" charset="0"/>
+                <a:ea typeface="Calibri" pitchFamily="34" charset="-122"/>
+                <a:cs typeface="Calibri" pitchFamily="34" charset="-120"/>
+              </a:rPr>
+              <a:t> · gli strumenti di PRG32</a:t>
             </a:r>
             <a:endParaRPr lang="en-US" sz="1100" dirty="0"/>
           </a:p>
@@ -6659,6 +7541,158 @@
       </p:graphicFrame>
       <p:sp>
         <p:nvSpPr>
+          <p:cNvPr id="4" name="Shape 1"/>
+          <p:cNvSpPr/>
+          <p:nvPr/>
+        </p:nvSpPr>
+        <p:spPr>
+          <a:xfrm>
+            <a:off x="7875600" y="91440"/>
+            <a:ext cx="3767455" cy="274320"/>
+          </a:xfrm>
+          <a:prstGeom prst="rect">
+            <a:avLst/>
+          </a:prstGeom>
+          <a:solidFill>
+            <a:srgbClr val="FEF3C7"/>
+          </a:solidFill>
+          <a:ln w="12700">
+            <a:solidFill>
+              <a:srgbClr val="B45309"/>
+            </a:solidFill>
+            <a:prstDash val="solid"/>
+          </a:ln>
+        </p:spPr>
+      </p:sp>
+      <p:sp>
+        <p:nvSpPr>
+          <p:cNvPr id="5" name="Shape 2"/>
+          <p:cNvSpPr/>
+          <p:nvPr/>
+        </p:nvSpPr>
+        <p:spPr>
+          <a:xfrm>
+            <a:off x="7875600" y="91440"/>
+            <a:ext cx="27432" cy="274320"/>
+          </a:xfrm>
+          <a:prstGeom prst="rect">
+            <a:avLst/>
+          </a:prstGeom>
+          <a:solidFill>
+            <a:srgbClr val="B45309"/>
+          </a:solidFill>
+          <a:ln w="12700">
+            <a:solidFill>
+              <a:srgbClr val="B45309"/>
+            </a:solidFill>
+            <a:prstDash val="solid"/>
+          </a:ln>
+        </p:spPr>
+      </p:sp>
+      <p:sp>
+        <p:nvSpPr>
+          <p:cNvPr id="6" name="Shape 3"/>
+          <p:cNvSpPr/>
+          <p:nvPr/>
+        </p:nvSpPr>
+        <p:spPr>
+          <a:xfrm>
+            <a:off x="7930464" y="91440"/>
+            <a:ext cx="27432" cy="274320"/>
+          </a:xfrm>
+          <a:prstGeom prst="rect">
+            <a:avLst/>
+          </a:prstGeom>
+          <a:solidFill>
+            <a:srgbClr val="B45309"/>
+          </a:solidFill>
+          <a:ln w="12700">
+            <a:solidFill>
+              <a:srgbClr val="B45309"/>
+            </a:solidFill>
+            <a:prstDash val="solid"/>
+          </a:ln>
+        </p:spPr>
+      </p:sp>
+      <p:pic>
+        <p:nvPicPr>
+          <p:cNvPr id="7" name="Image 0" descr="preencoded.png">    </p:cNvPr>
+          <p:cNvPicPr>
+            <a:picLocks noChangeAspect="1"/>
+          </p:cNvPicPr>
+          <p:nvPr/>
+        </p:nvPicPr>
+        <p:blipFill>
+          <a:blip r:embed="rId1"/>
+          <a:stretch>
+            <a:fillRect/>
+          </a:stretch>
+        </p:blipFill>
+        <p:spPr>
+          <a:xfrm>
+            <a:off x="8003616" y="128016"/>
+            <a:ext cx="201168" cy="201168"/>
+          </a:xfrm>
+          <a:prstGeom prst="rect">
+            <a:avLst/>
+          </a:prstGeom>
+        </p:spPr>
+      </p:pic>
+      <p:sp>
+        <p:nvSpPr>
+          <p:cNvPr id="8" name="Text 4"/>
+          <p:cNvSpPr txBox="1"/>
+          <p:nvPr/>
+        </p:nvSpPr>
+        <p:spPr>
+          <a:xfrm>
+            <a:off x="8259648" y="91440"/>
+            <a:ext cx="3346831" cy="274320"/>
+          </a:xfrm>
+          <a:prstGeom prst="rect">
+            <a:avLst/>
+          </a:prstGeom>
+          <a:noFill/>
+          <a:ln/>
+        </p:spPr>
+        <p:txBody>
+          <a:bodyPr wrap="square" lIns="0" tIns="0" rIns="0" bIns="0" rtlCol="0" anchor="ctr"/>
+          <a:lstStyle/>
+          <a:p>
+            <a:pPr indent="0" marL="0">
+              <a:buNone/>
+            </a:pPr>
+            <a:r>
+              <a:rPr lang="en-US" sz="1100" b="1" dirty="0">
+                <a:solidFill>
+                  <a:srgbClr val="92400E"/>
+                </a:solidFill>
+                <a:latin typeface="Calibri" pitchFamily="34" charset="0"/>
+                <a:ea typeface="Calibri" pitchFamily="34" charset="-122"/>
+                <a:cs typeface="Calibri" pitchFamily="34" charset="-120"/>
+              </a:rPr>
+              <a:t>DA UTILIZZARE OGGI</a:t>
+            </a:r>
+            <a:pPr indent="0" marL="0">
+              <a:buNone/>
+            </a:pPr>
+            <a:r>
+              <a:rPr lang="en-US" sz="1100" dirty="0">
+                <a:solidFill>
+                  <a:srgbClr val="92400E"/>
+                </a:solidFill>
+                <a:latin typeface="Calibri" pitchFamily="34" charset="0"/>
+                <a:ea typeface="Calibri" pitchFamily="34" charset="-122"/>
+                <a:cs typeface="Calibri" pitchFamily="34" charset="-120"/>
+              </a:rPr>
+              <a:t> · gli strumenti di PRG32</a:t>
+            </a:r>
+            <a:endParaRPr lang="en-US" sz="1100" dirty="0"/>
+          </a:p>
+        </p:txBody>
+      </p:sp>
+      <p:sp>
+        <p:nvSpPr>
           <p:cNvPr id="25" name="Slide Number Placeholder 0"/>
           <p:cNvSpPr>
             <a:spLocks noGrp="1"/>
@@ -8867,6 +9901,133 @@
               <a:t>Questa è la virgola fissa. Da dove viene il trucco, e quando non basta?</a:t>
             </a:r>
             <a:endParaRPr lang="en-US" sz="1200" dirty="0"/>
+          </a:p>
+        </p:txBody>
+      </p:sp>
+      <p:sp>
+        <p:nvSpPr>
+          <p:cNvPr id="17" name="Shape 15"/>
+          <p:cNvSpPr/>
+          <p:nvPr/>
+        </p:nvSpPr>
+        <p:spPr>
+          <a:xfrm>
+            <a:off x="8182940" y="91440"/>
+            <a:ext cx="3460115" cy="274320"/>
+          </a:xfrm>
+          <a:prstGeom prst="rect">
+            <a:avLst/>
+          </a:prstGeom>
+          <a:solidFill>
+            <a:srgbClr val="E0F2FE"/>
+          </a:solidFill>
+          <a:ln w="12700">
+            <a:solidFill>
+              <a:srgbClr val="0369A1"/>
+            </a:solidFill>
+            <a:prstDash val="solid"/>
+          </a:ln>
+        </p:spPr>
+      </p:sp>
+      <p:sp>
+        <p:nvSpPr>
+          <p:cNvPr id="18" name="Shape 16"/>
+          <p:cNvSpPr/>
+          <p:nvPr/>
+        </p:nvSpPr>
+        <p:spPr>
+          <a:xfrm>
+            <a:off x="8182940" y="91440"/>
+            <a:ext cx="73152" cy="274320"/>
+          </a:xfrm>
+          <a:prstGeom prst="rect">
+            <a:avLst/>
+          </a:prstGeom>
+          <a:solidFill>
+            <a:srgbClr val="0369A1"/>
+          </a:solidFill>
+          <a:ln w="12700">
+            <a:solidFill>
+              <a:srgbClr val="0369A1"/>
+            </a:solidFill>
+            <a:prstDash val="solid"/>
+          </a:ln>
+        </p:spPr>
+      </p:sp>
+      <p:pic>
+        <p:nvPicPr>
+          <p:cNvPr id="19" name="Image 0" descr="preencoded.png">    </p:cNvPr>
+          <p:cNvPicPr>
+            <a:picLocks noChangeAspect="1"/>
+          </p:cNvPicPr>
+          <p:nvPr/>
+        </p:nvPicPr>
+        <p:blipFill>
+          <a:blip r:embed="rId1"/>
+          <a:stretch>
+            <a:fillRect/>
+          </a:stretch>
+        </p:blipFill>
+        <p:spPr>
+          <a:xfrm>
+            <a:off x="8310956" y="128016"/>
+            <a:ext cx="201168" cy="201168"/>
+          </a:xfrm>
+          <a:prstGeom prst="rect">
+            <a:avLst/>
+          </a:prstGeom>
+        </p:spPr>
+      </p:pic>
+      <p:sp>
+        <p:nvSpPr>
+          <p:cNvPr id="20" name="Text 17"/>
+          <p:cNvSpPr txBox="1"/>
+          <p:nvPr/>
+        </p:nvSpPr>
+        <p:spPr>
+          <a:xfrm>
+            <a:off x="8566988" y="91440"/>
+            <a:ext cx="3039491" cy="274320"/>
+          </a:xfrm>
+          <a:prstGeom prst="rect">
+            <a:avLst/>
+          </a:prstGeom>
+          <a:noFill/>
+          <a:ln/>
+        </p:spPr>
+        <p:txBody>
+          <a:bodyPr wrap="square" lIns="0" tIns="0" rIns="0" bIns="0" rtlCol="0" anchor="ctr"/>
+          <a:lstStyle/>
+          <a:p>
+            <a:pPr indent="0" marL="0">
+              <a:buNone/>
+            </a:pPr>
+            <a:r>
+              <a:rPr lang="en-US" sz="1100" b="1" dirty="0">
+                <a:solidFill>
+                  <a:srgbClr val="075985"/>
+                </a:solidFill>
+                <a:latin typeface="Calibri" pitchFamily="34" charset="0"/>
+                <a:ea typeface="Calibri" pitchFamily="34" charset="-122"/>
+                <a:cs typeface="Calibri" pitchFamily="34" charset="-120"/>
+              </a:rPr>
+              <a:t>DA COMPRENDERE OGGI</a:t>
+            </a:r>
+            <a:pPr indent="0" marL="0">
+              <a:buNone/>
+            </a:pPr>
+            <a:r>
+              <a:rPr lang="en-US" sz="1100" dirty="0">
+                <a:solidFill>
+                  <a:srgbClr val="075985"/>
+                </a:solidFill>
+                <a:latin typeface="Calibri" pitchFamily="34" charset="0"/>
+                <a:ea typeface="Calibri" pitchFamily="34" charset="-122"/>
+                <a:cs typeface="Calibri" pitchFamily="34" charset="-120"/>
+              </a:rPr>
+              <a:t> · la virgola fissa</a:t>
+            </a:r>
+            <a:endParaRPr lang="en-US" sz="1100" dirty="0"/>
           </a:p>
         </p:txBody>
       </p:sp>
@@ -10277,6 +11438,133 @@
       </p:graphicFrame>
       <p:sp>
         <p:nvSpPr>
+          <p:cNvPr id="14" name="Shape 11"/>
+          <p:cNvSpPr/>
+          <p:nvPr/>
+        </p:nvSpPr>
+        <p:spPr>
+          <a:xfrm>
+            <a:off x="8182940" y="91440"/>
+            <a:ext cx="3460115" cy="274320"/>
+          </a:xfrm>
+          <a:prstGeom prst="rect">
+            <a:avLst/>
+          </a:prstGeom>
+          <a:solidFill>
+            <a:srgbClr val="E0F2FE"/>
+          </a:solidFill>
+          <a:ln w="12700">
+            <a:solidFill>
+              <a:srgbClr val="0369A1"/>
+            </a:solidFill>
+            <a:prstDash val="solid"/>
+          </a:ln>
+        </p:spPr>
+      </p:sp>
+      <p:sp>
+        <p:nvSpPr>
+          <p:cNvPr id="15" name="Shape 12"/>
+          <p:cNvSpPr/>
+          <p:nvPr/>
+        </p:nvSpPr>
+        <p:spPr>
+          <a:xfrm>
+            <a:off x="8182940" y="91440"/>
+            <a:ext cx="73152" cy="274320"/>
+          </a:xfrm>
+          <a:prstGeom prst="rect">
+            <a:avLst/>
+          </a:prstGeom>
+          <a:solidFill>
+            <a:srgbClr val="0369A1"/>
+          </a:solidFill>
+          <a:ln w="12700">
+            <a:solidFill>
+              <a:srgbClr val="0369A1"/>
+            </a:solidFill>
+            <a:prstDash val="solid"/>
+          </a:ln>
+        </p:spPr>
+      </p:sp>
+      <p:pic>
+        <p:nvPicPr>
+          <p:cNvPr id="16" name="Image 0" descr="preencoded.png">    </p:cNvPr>
+          <p:cNvPicPr>
+            <a:picLocks noChangeAspect="1"/>
+          </p:cNvPicPr>
+          <p:nvPr/>
+        </p:nvPicPr>
+        <p:blipFill>
+          <a:blip r:embed="rId1"/>
+          <a:stretch>
+            <a:fillRect/>
+          </a:stretch>
+        </p:blipFill>
+        <p:spPr>
+          <a:xfrm>
+            <a:off x="8310956" y="128016"/>
+            <a:ext cx="201168" cy="201168"/>
+          </a:xfrm>
+          <a:prstGeom prst="rect">
+            <a:avLst/>
+          </a:prstGeom>
+        </p:spPr>
+      </p:pic>
+      <p:sp>
+        <p:nvSpPr>
+          <p:cNvPr id="17" name="Text 13"/>
+          <p:cNvSpPr txBox="1"/>
+          <p:nvPr/>
+        </p:nvSpPr>
+        <p:spPr>
+          <a:xfrm>
+            <a:off x="8566988" y="91440"/>
+            <a:ext cx="3039491" cy="274320"/>
+          </a:xfrm>
+          <a:prstGeom prst="rect">
+            <a:avLst/>
+          </a:prstGeom>
+          <a:noFill/>
+          <a:ln/>
+        </p:spPr>
+        <p:txBody>
+          <a:bodyPr wrap="square" lIns="0" tIns="0" rIns="0" bIns="0" rtlCol="0" anchor="ctr"/>
+          <a:lstStyle/>
+          <a:p>
+            <a:pPr indent="0" marL="0">
+              <a:buNone/>
+            </a:pPr>
+            <a:r>
+              <a:rPr lang="en-US" sz="1100" b="1" dirty="0">
+                <a:solidFill>
+                  <a:srgbClr val="075985"/>
+                </a:solidFill>
+                <a:latin typeface="Calibri" pitchFamily="34" charset="0"/>
+                <a:ea typeface="Calibri" pitchFamily="34" charset="-122"/>
+                <a:cs typeface="Calibri" pitchFamily="34" charset="-120"/>
+              </a:rPr>
+              <a:t>DA COMPRENDERE OGGI</a:t>
+            </a:r>
+            <a:pPr indent="0" marL="0">
+              <a:buNone/>
+            </a:pPr>
+            <a:r>
+              <a:rPr lang="en-US" sz="1100" dirty="0">
+                <a:solidFill>
+                  <a:srgbClr val="075985"/>
+                </a:solidFill>
+                <a:latin typeface="Calibri" pitchFamily="34" charset="0"/>
+                <a:ea typeface="Calibri" pitchFamily="34" charset="-122"/>
+                <a:cs typeface="Calibri" pitchFamily="34" charset="-120"/>
+              </a:rPr>
+              <a:t> · la virgola fissa</a:t>
+            </a:r>
+            <a:endParaRPr lang="en-US" sz="1100" dirty="0"/>
+          </a:p>
+        </p:txBody>
+      </p:sp>
+      <p:sp>
+        <p:nvSpPr>
           <p:cNvPr id="25" name="Slide Number Placeholder 0"/>
           <p:cNvSpPr>
             <a:spLocks noGrp="1"/>
@@ -10894,6 +12182,133 @@
       </p:sp>
       <p:sp>
         <p:nvSpPr>
+          <p:cNvPr id="15" name="Shape 13"/>
+          <p:cNvSpPr/>
+          <p:nvPr/>
+        </p:nvSpPr>
+        <p:spPr>
+          <a:xfrm>
+            <a:off x="7526350" y="91440"/>
+            <a:ext cx="4116705" cy="274320"/>
+          </a:xfrm>
+          <a:prstGeom prst="rect">
+            <a:avLst/>
+          </a:prstGeom>
+          <a:solidFill>
+            <a:srgbClr val="E0F2FE"/>
+          </a:solidFill>
+          <a:ln w="12700">
+            <a:solidFill>
+              <a:srgbClr val="0369A1"/>
+            </a:solidFill>
+            <a:prstDash val="solid"/>
+          </a:ln>
+        </p:spPr>
+      </p:sp>
+      <p:sp>
+        <p:nvSpPr>
+          <p:cNvPr id="16" name="Shape 14"/>
+          <p:cNvSpPr/>
+          <p:nvPr/>
+        </p:nvSpPr>
+        <p:spPr>
+          <a:xfrm>
+            <a:off x="7526350" y="91440"/>
+            <a:ext cx="73152" cy="274320"/>
+          </a:xfrm>
+          <a:prstGeom prst="rect">
+            <a:avLst/>
+          </a:prstGeom>
+          <a:solidFill>
+            <a:srgbClr val="0369A1"/>
+          </a:solidFill>
+          <a:ln w="12700">
+            <a:solidFill>
+              <a:srgbClr val="0369A1"/>
+            </a:solidFill>
+            <a:prstDash val="solid"/>
+          </a:ln>
+        </p:spPr>
+      </p:sp>
+      <p:pic>
+        <p:nvPicPr>
+          <p:cNvPr id="17" name="Image 0" descr="preencoded.png">    </p:cNvPr>
+          <p:cNvPicPr>
+            <a:picLocks noChangeAspect="1"/>
+          </p:cNvPicPr>
+          <p:nvPr/>
+        </p:nvPicPr>
+        <p:blipFill>
+          <a:blip r:embed="rId1"/>
+          <a:stretch>
+            <a:fillRect/>
+          </a:stretch>
+        </p:blipFill>
+        <p:spPr>
+          <a:xfrm>
+            <a:off x="7654366" y="128016"/>
+            <a:ext cx="201168" cy="201168"/>
+          </a:xfrm>
+          <a:prstGeom prst="rect">
+            <a:avLst/>
+          </a:prstGeom>
+        </p:spPr>
+      </p:pic>
+      <p:sp>
+        <p:nvSpPr>
+          <p:cNvPr id="18" name="Text 15"/>
+          <p:cNvSpPr txBox="1"/>
+          <p:nvPr/>
+        </p:nvSpPr>
+        <p:spPr>
+          <a:xfrm>
+            <a:off x="7910398" y="91440"/>
+            <a:ext cx="3696081" cy="274320"/>
+          </a:xfrm>
+          <a:prstGeom prst="rect">
+            <a:avLst/>
+          </a:prstGeom>
+          <a:noFill/>
+          <a:ln/>
+        </p:spPr>
+        <p:txBody>
+          <a:bodyPr wrap="square" lIns="0" tIns="0" rIns="0" bIns="0" rtlCol="0" anchor="ctr"/>
+          <a:lstStyle/>
+          <a:p>
+            <a:pPr indent="0" marL="0">
+              <a:buNone/>
+            </a:pPr>
+            <a:r>
+              <a:rPr lang="en-US" sz="1100" b="1" dirty="0">
+                <a:solidFill>
+                  <a:srgbClr val="075985"/>
+                </a:solidFill>
+                <a:latin typeface="Calibri" pitchFamily="34" charset="0"/>
+                <a:ea typeface="Calibri" pitchFamily="34" charset="-122"/>
+                <a:cs typeface="Calibri" pitchFamily="34" charset="-120"/>
+              </a:rPr>
+              <a:t>DA COMPRENDERE OGGI</a:t>
+            </a:r>
+            <a:pPr indent="0" marL="0">
+              <a:buNone/>
+            </a:pPr>
+            <a:r>
+              <a:rPr lang="en-US" sz="1100" dirty="0">
+                <a:solidFill>
+                  <a:srgbClr val="075985"/>
+                </a:solidFill>
+                <a:latin typeface="Calibri" pitchFamily="34" charset="0"/>
+                <a:ea typeface="Calibri" pitchFamily="34" charset="-122"/>
+                <a:cs typeface="Calibri" pitchFamily="34" charset="-120"/>
+              </a:rPr>
+              <a:t> · la virgola mobile IEEE 754</a:t>
+            </a:r>
+            <a:endParaRPr lang="en-US" sz="1100" dirty="0"/>
+          </a:p>
+        </p:txBody>
+      </p:sp>
+      <p:sp>
+        <p:nvSpPr>
           <p:cNvPr id="25" name="Slide Number Placeholder 0"/>
           <p:cNvSpPr>
             <a:spLocks noGrp="1"/>
@@ -11377,6 +12792,158 @@
       </p:sp>
       <p:sp>
         <p:nvSpPr>
+          <p:cNvPr id="5" name="Shape 3"/>
+          <p:cNvSpPr/>
+          <p:nvPr/>
+        </p:nvSpPr>
+        <p:spPr>
+          <a:xfrm>
+            <a:off x="7941259" y="91440"/>
+            <a:ext cx="3701796" cy="274320"/>
+          </a:xfrm>
+          <a:prstGeom prst="rect">
+            <a:avLst/>
+          </a:prstGeom>
+          <a:solidFill>
+            <a:srgbClr val="FEF3C7"/>
+          </a:solidFill>
+          <a:ln w="12700">
+            <a:solidFill>
+              <a:srgbClr val="B45309"/>
+            </a:solidFill>
+            <a:prstDash val="solid"/>
+          </a:ln>
+        </p:spPr>
+      </p:sp>
+      <p:sp>
+        <p:nvSpPr>
+          <p:cNvPr id="6" name="Shape 4"/>
+          <p:cNvSpPr/>
+          <p:nvPr/>
+        </p:nvSpPr>
+        <p:spPr>
+          <a:xfrm>
+            <a:off x="7941259" y="91440"/>
+            <a:ext cx="27432" cy="274320"/>
+          </a:xfrm>
+          <a:prstGeom prst="rect">
+            <a:avLst/>
+          </a:prstGeom>
+          <a:solidFill>
+            <a:srgbClr val="B45309"/>
+          </a:solidFill>
+          <a:ln w="12700">
+            <a:solidFill>
+              <a:srgbClr val="B45309"/>
+            </a:solidFill>
+            <a:prstDash val="solid"/>
+          </a:ln>
+        </p:spPr>
+      </p:sp>
+      <p:sp>
+        <p:nvSpPr>
+          <p:cNvPr id="7" name="Shape 5"/>
+          <p:cNvSpPr/>
+          <p:nvPr/>
+        </p:nvSpPr>
+        <p:spPr>
+          <a:xfrm>
+            <a:off x="7996123" y="91440"/>
+            <a:ext cx="27432" cy="274320"/>
+          </a:xfrm>
+          <a:prstGeom prst="rect">
+            <a:avLst/>
+          </a:prstGeom>
+          <a:solidFill>
+            <a:srgbClr val="B45309"/>
+          </a:solidFill>
+          <a:ln w="12700">
+            <a:solidFill>
+              <a:srgbClr val="B45309"/>
+            </a:solidFill>
+            <a:prstDash val="solid"/>
+          </a:ln>
+        </p:spPr>
+      </p:sp>
+      <p:pic>
+        <p:nvPicPr>
+          <p:cNvPr id="8" name="Image 0" descr="preencoded.png">    </p:cNvPr>
+          <p:cNvPicPr>
+            <a:picLocks noChangeAspect="1"/>
+          </p:cNvPicPr>
+          <p:nvPr/>
+        </p:nvPicPr>
+        <p:blipFill>
+          <a:blip r:embed="rId1"/>
+          <a:stretch>
+            <a:fillRect/>
+          </a:stretch>
+        </p:blipFill>
+        <p:spPr>
+          <a:xfrm>
+            <a:off x="8069275" y="128016"/>
+            <a:ext cx="201168" cy="201168"/>
+          </a:xfrm>
+          <a:prstGeom prst="rect">
+            <a:avLst/>
+          </a:prstGeom>
+        </p:spPr>
+      </p:pic>
+      <p:sp>
+        <p:nvSpPr>
+          <p:cNvPr id="9" name="Text 6"/>
+          <p:cNvSpPr txBox="1"/>
+          <p:nvPr/>
+        </p:nvSpPr>
+        <p:spPr>
+          <a:xfrm>
+            <a:off x="8325307" y="91440"/>
+            <a:ext cx="3281172" cy="274320"/>
+          </a:xfrm>
+          <a:prstGeom prst="rect">
+            <a:avLst/>
+          </a:prstGeom>
+          <a:noFill/>
+          <a:ln/>
+        </p:spPr>
+        <p:txBody>
+          <a:bodyPr wrap="square" lIns="0" tIns="0" rIns="0" bIns="0" rtlCol="0" anchor="ctr"/>
+          <a:lstStyle/>
+          <a:p>
+            <a:pPr indent="0" marL="0">
+              <a:buNone/>
+            </a:pPr>
+            <a:r>
+              <a:rPr lang="en-US" sz="1100" b="1" dirty="0">
+                <a:solidFill>
+                  <a:srgbClr val="92400E"/>
+                </a:solidFill>
+                <a:latin typeface="Calibri" pitchFamily="34" charset="0"/>
+                <a:ea typeface="Calibri" pitchFamily="34" charset="-122"/>
+                <a:cs typeface="Calibri" pitchFamily="34" charset="-120"/>
+              </a:rPr>
+              <a:t>DA UTILIZZARE OGGI</a:t>
+            </a:r>
+            <a:pPr indent="0" marL="0">
+              <a:buNone/>
+            </a:pPr>
+            <a:r>
+              <a:rPr lang="en-US" sz="1100" dirty="0">
+                <a:solidFill>
+                  <a:srgbClr val="92400E"/>
+                </a:solidFill>
+                <a:latin typeface="Calibri" pitchFamily="34" charset="0"/>
+                <a:ea typeface="Calibri" pitchFamily="34" charset="-122"/>
+                <a:cs typeface="Calibri" pitchFamily="34" charset="-120"/>
+              </a:rPr>
+              <a:t> · il programma completo</a:t>
+            </a:r>
+            <a:endParaRPr lang="en-US" sz="1100" dirty="0"/>
+          </a:p>
+        </p:txBody>
+      </p:sp>
+      <p:sp>
+        <p:nvSpPr>
           <p:cNvPr id="25" name="Slide Number Placeholder 0"/>
           <p:cNvSpPr>
             <a:spLocks noGrp="1"/>
@@ -11687,6 +13254,158 @@
       </p:sp>
       <p:sp>
         <p:nvSpPr>
+          <p:cNvPr id="5" name="Shape 3"/>
+          <p:cNvSpPr/>
+          <p:nvPr/>
+        </p:nvSpPr>
+        <p:spPr>
+          <a:xfrm>
+            <a:off x="7941259" y="91440"/>
+            <a:ext cx="3701796" cy="274320"/>
+          </a:xfrm>
+          <a:prstGeom prst="rect">
+            <a:avLst/>
+          </a:prstGeom>
+          <a:solidFill>
+            <a:srgbClr val="FEF3C7"/>
+          </a:solidFill>
+          <a:ln w="12700">
+            <a:solidFill>
+              <a:srgbClr val="B45309"/>
+            </a:solidFill>
+            <a:prstDash val="solid"/>
+          </a:ln>
+        </p:spPr>
+      </p:sp>
+      <p:sp>
+        <p:nvSpPr>
+          <p:cNvPr id="6" name="Shape 4"/>
+          <p:cNvSpPr/>
+          <p:nvPr/>
+        </p:nvSpPr>
+        <p:spPr>
+          <a:xfrm>
+            <a:off x="7941259" y="91440"/>
+            <a:ext cx="27432" cy="274320"/>
+          </a:xfrm>
+          <a:prstGeom prst="rect">
+            <a:avLst/>
+          </a:prstGeom>
+          <a:solidFill>
+            <a:srgbClr val="B45309"/>
+          </a:solidFill>
+          <a:ln w="12700">
+            <a:solidFill>
+              <a:srgbClr val="B45309"/>
+            </a:solidFill>
+            <a:prstDash val="solid"/>
+          </a:ln>
+        </p:spPr>
+      </p:sp>
+      <p:sp>
+        <p:nvSpPr>
+          <p:cNvPr id="7" name="Shape 5"/>
+          <p:cNvSpPr/>
+          <p:nvPr/>
+        </p:nvSpPr>
+        <p:spPr>
+          <a:xfrm>
+            <a:off x="7996123" y="91440"/>
+            <a:ext cx="27432" cy="274320"/>
+          </a:xfrm>
+          <a:prstGeom prst="rect">
+            <a:avLst/>
+          </a:prstGeom>
+          <a:solidFill>
+            <a:srgbClr val="B45309"/>
+          </a:solidFill>
+          <a:ln w="12700">
+            <a:solidFill>
+              <a:srgbClr val="B45309"/>
+            </a:solidFill>
+            <a:prstDash val="solid"/>
+          </a:ln>
+        </p:spPr>
+      </p:sp>
+      <p:pic>
+        <p:nvPicPr>
+          <p:cNvPr id="8" name="Image 0" descr="preencoded.png">    </p:cNvPr>
+          <p:cNvPicPr>
+            <a:picLocks noChangeAspect="1"/>
+          </p:cNvPicPr>
+          <p:nvPr/>
+        </p:nvPicPr>
+        <p:blipFill>
+          <a:blip r:embed="rId1"/>
+          <a:stretch>
+            <a:fillRect/>
+          </a:stretch>
+        </p:blipFill>
+        <p:spPr>
+          <a:xfrm>
+            <a:off x="8069275" y="128016"/>
+            <a:ext cx="201168" cy="201168"/>
+          </a:xfrm>
+          <a:prstGeom prst="rect">
+            <a:avLst/>
+          </a:prstGeom>
+        </p:spPr>
+      </p:pic>
+      <p:sp>
+        <p:nvSpPr>
+          <p:cNvPr id="9" name="Text 6"/>
+          <p:cNvSpPr txBox="1"/>
+          <p:nvPr/>
+        </p:nvSpPr>
+        <p:spPr>
+          <a:xfrm>
+            <a:off x="8325307" y="91440"/>
+            <a:ext cx="3281172" cy="274320"/>
+          </a:xfrm>
+          <a:prstGeom prst="rect">
+            <a:avLst/>
+          </a:prstGeom>
+          <a:noFill/>
+          <a:ln/>
+        </p:spPr>
+        <p:txBody>
+          <a:bodyPr wrap="square" lIns="0" tIns="0" rIns="0" bIns="0" rtlCol="0" anchor="ctr"/>
+          <a:lstStyle/>
+          <a:p>
+            <a:pPr indent="0" marL="0">
+              <a:buNone/>
+            </a:pPr>
+            <a:r>
+              <a:rPr lang="en-US" sz="1100" b="1" dirty="0">
+                <a:solidFill>
+                  <a:srgbClr val="92400E"/>
+                </a:solidFill>
+                <a:latin typeface="Calibri" pitchFamily="34" charset="0"/>
+                <a:ea typeface="Calibri" pitchFamily="34" charset="-122"/>
+                <a:cs typeface="Calibri" pitchFamily="34" charset="-120"/>
+              </a:rPr>
+              <a:t>DA UTILIZZARE OGGI</a:t>
+            </a:r>
+            <a:pPr indent="0" marL="0">
+              <a:buNone/>
+            </a:pPr>
+            <a:r>
+              <a:rPr lang="en-US" sz="1100" dirty="0">
+                <a:solidFill>
+                  <a:srgbClr val="92400E"/>
+                </a:solidFill>
+                <a:latin typeface="Calibri" pitchFamily="34" charset="0"/>
+                <a:ea typeface="Calibri" pitchFamily="34" charset="-122"/>
+                <a:cs typeface="Calibri" pitchFamily="34" charset="-120"/>
+              </a:rPr>
+              <a:t> · il programma completo</a:t>
+            </a:r>
+            <a:endParaRPr lang="en-US" sz="1100" dirty="0"/>
+          </a:p>
+        </p:txBody>
+      </p:sp>
+      <p:sp>
+        <p:nvSpPr>
           <p:cNvPr id="25" name="Slide Number Placeholder 0"/>
           <p:cNvSpPr>
             <a:spLocks noGrp="1"/>
@@ -12213,6 +13932,158 @@
               <a:t># Q24.8: 24 bits of pixels, 8 bits of fraction</a:t>
             </a:r>
             <a:endParaRPr lang="en-US" sz="1400" dirty="0"/>
+          </a:p>
+        </p:txBody>
+      </p:sp>
+      <p:sp>
+        <p:nvSpPr>
+          <p:cNvPr id="5" name="Shape 3"/>
+          <p:cNvSpPr/>
+          <p:nvPr/>
+        </p:nvSpPr>
+        <p:spPr>
+          <a:xfrm>
+            <a:off x="7941259" y="91440"/>
+            <a:ext cx="3701796" cy="274320"/>
+          </a:xfrm>
+          <a:prstGeom prst="rect">
+            <a:avLst/>
+          </a:prstGeom>
+          <a:solidFill>
+            <a:srgbClr val="FEF3C7"/>
+          </a:solidFill>
+          <a:ln w="12700">
+            <a:solidFill>
+              <a:srgbClr val="B45309"/>
+            </a:solidFill>
+            <a:prstDash val="solid"/>
+          </a:ln>
+        </p:spPr>
+      </p:sp>
+      <p:sp>
+        <p:nvSpPr>
+          <p:cNvPr id="6" name="Shape 4"/>
+          <p:cNvSpPr/>
+          <p:nvPr/>
+        </p:nvSpPr>
+        <p:spPr>
+          <a:xfrm>
+            <a:off x="7941259" y="91440"/>
+            <a:ext cx="27432" cy="274320"/>
+          </a:xfrm>
+          <a:prstGeom prst="rect">
+            <a:avLst/>
+          </a:prstGeom>
+          <a:solidFill>
+            <a:srgbClr val="B45309"/>
+          </a:solidFill>
+          <a:ln w="12700">
+            <a:solidFill>
+              <a:srgbClr val="B45309"/>
+            </a:solidFill>
+            <a:prstDash val="solid"/>
+          </a:ln>
+        </p:spPr>
+      </p:sp>
+      <p:sp>
+        <p:nvSpPr>
+          <p:cNvPr id="7" name="Shape 5"/>
+          <p:cNvSpPr/>
+          <p:nvPr/>
+        </p:nvSpPr>
+        <p:spPr>
+          <a:xfrm>
+            <a:off x="7996123" y="91440"/>
+            <a:ext cx="27432" cy="274320"/>
+          </a:xfrm>
+          <a:prstGeom prst="rect">
+            <a:avLst/>
+          </a:prstGeom>
+          <a:solidFill>
+            <a:srgbClr val="B45309"/>
+          </a:solidFill>
+          <a:ln w="12700">
+            <a:solidFill>
+              <a:srgbClr val="B45309"/>
+            </a:solidFill>
+            <a:prstDash val="solid"/>
+          </a:ln>
+        </p:spPr>
+      </p:sp>
+      <p:pic>
+        <p:nvPicPr>
+          <p:cNvPr id="8" name="Image 0" descr="preencoded.png">    </p:cNvPr>
+          <p:cNvPicPr>
+            <a:picLocks noChangeAspect="1"/>
+          </p:cNvPicPr>
+          <p:nvPr/>
+        </p:nvPicPr>
+        <p:blipFill>
+          <a:blip r:embed="rId1"/>
+          <a:stretch>
+            <a:fillRect/>
+          </a:stretch>
+        </p:blipFill>
+        <p:spPr>
+          <a:xfrm>
+            <a:off x="8069275" y="128016"/>
+            <a:ext cx="201168" cy="201168"/>
+          </a:xfrm>
+          <a:prstGeom prst="rect">
+            <a:avLst/>
+          </a:prstGeom>
+        </p:spPr>
+      </p:pic>
+      <p:sp>
+        <p:nvSpPr>
+          <p:cNvPr id="9" name="Text 6"/>
+          <p:cNvSpPr txBox="1"/>
+          <p:nvPr/>
+        </p:nvSpPr>
+        <p:spPr>
+          <a:xfrm>
+            <a:off x="8325307" y="91440"/>
+            <a:ext cx="3281172" cy="274320"/>
+          </a:xfrm>
+          <a:prstGeom prst="rect">
+            <a:avLst/>
+          </a:prstGeom>
+          <a:noFill/>
+          <a:ln/>
+        </p:spPr>
+        <p:txBody>
+          <a:bodyPr wrap="square" lIns="0" tIns="0" rIns="0" bIns="0" rtlCol="0" anchor="ctr"/>
+          <a:lstStyle/>
+          <a:p>
+            <a:pPr indent="0" marL="0">
+              <a:buNone/>
+            </a:pPr>
+            <a:r>
+              <a:rPr lang="en-US" sz="1100" b="1" dirty="0">
+                <a:solidFill>
+                  <a:srgbClr val="92400E"/>
+                </a:solidFill>
+                <a:latin typeface="Calibri" pitchFamily="34" charset="0"/>
+                <a:ea typeface="Calibri" pitchFamily="34" charset="-122"/>
+                <a:cs typeface="Calibri" pitchFamily="34" charset="-120"/>
+              </a:rPr>
+              <a:t>DA UTILIZZARE OGGI</a:t>
+            </a:r>
+            <a:pPr indent="0" marL="0">
+              <a:buNone/>
+            </a:pPr>
+            <a:r>
+              <a:rPr lang="en-US" sz="1100" dirty="0">
+                <a:solidFill>
+                  <a:srgbClr val="92400E"/>
+                </a:solidFill>
+                <a:latin typeface="Calibri" pitchFamily="34" charset="0"/>
+                <a:ea typeface="Calibri" pitchFamily="34" charset="-122"/>
+                <a:cs typeface="Calibri" pitchFamily="34" charset="-120"/>
+              </a:rPr>
+              <a:t> · il programma completo</a:t>
+            </a:r>
+            <a:endParaRPr lang="en-US" sz="1100" dirty="0"/>
           </a:p>
         </p:txBody>
       </p:sp>

--- a/it/slides/06-Architettura_dei_Calcolatori-Rappresentazione_dei_Numeri_Reali-Codice.pptx
+++ b/it/slides/06-Architettura_dei_Calcolatori-Rappresentazione_dei_Numeri_Reali-Codice.pptx
@@ -120,35 +120,35 @@
   <p:extLst>
     <p:ext uri="{521415D9-36F7-43E2-AB2F-B90AF26B5E84}">
       <p14:sectionLst xmlns:p14="http://schemas.microsoft.com/office/powerpoint/2010/main">
-        <p14:section name="Apertura" id="{ab848faa-13dc-70f2-e48d-1010daedb598}">
+        <p14:section name="Apertura" id="{6ecd6ccc-b8ac-afe2-fff5-af34caf61da0}">
           <p14:sldIdLst>
             <p14:sldId id="256"/>
             <p14:sldId id="257"/>
           </p14:sldIdLst>
         </p14:section>
-        <p14:section name="Riscaldamento sulla macchina" id="{1de02f3c-78cc-ed35-3ce0-5762024f0a42}">
+        <p14:section name="Riscaldamento sulla macchina" id="{be421a7d-41d1-bc8b-7d6d-50e9bd97da9a}">
           <p14:sldIdLst>
             <p14:sldId id="258"/>
           </p14:sldIdLst>
         </p14:section>
-        <p14:section name="Virgola fissa" id="{dfde395b-d1cc-d351-9631-178ed4b43b07}">
+        <p14:section name="Virgola fissa" id="{61a49288-1108-550f-5077-cf9e3a6b8aef}">
           <p14:sldIdLst>
             <p14:sldId id="259"/>
           </p14:sldIdLst>
         </p14:section>
-        <p14:section name="Virgola mobile" id="{0de386b1-db2f-73b4-e814-fe292480b60e}">
+        <p14:section name="Virgola mobile" id="{5da663ac-6a3f-e21d-e568-ff944689c22c}">
           <p14:sldIdLst>
             <p14:sldId id="260"/>
           </p14:sldIdLst>
         </p14:section>
-        <p14:section name="Il programma completo" id="{4dbfd44d-9cf2-2edf-d23e-b0e4d00b6c32}">
+        <p14:section name="Il programma completo" id="{db5d65ff-f36c-4912-1be1-0398c0d0247e}">
           <p14:sldIdLst>
             <p14:sldId id="261"/>
             <p14:sldId id="262"/>
             <p14:sldId id="263"/>
           </p14:sldIdLst>
         </p14:section>
-        <p14:section name="Eseguire e provare" id="{185d03c9-4980-1ef2-5b4d-efd314437652}">
+        <p14:section name="Eseguire e provare" id="{0f4e9443-3922-66c9-ef42-b97736ef14cb}">
           <p14:sldIdLst>
             <p14:sldId id="264"/>
             <p14:sldId id="265"/>
@@ -157,7 +157,7 @@
             <p14:sldId id="268"/>
           </p14:sldIdLst>
         </p14:section>
-        <p14:section name="Esercizi" id="{cd27182d-52e8-f42c-57cd-64cfa89ef69d}">
+        <p14:section name="Esercizi" id="{8c56a13b-736d-2168-3241-5b2c40f9e089}">
           <p14:sldIdLst>
             <p14:sldId id="269"/>
           </p14:sldIdLst>
